--- a/presentations/algoritm/algoritm-predictive-maintenance-Swiss-full.pptx
+++ b/presentations/algoritm/algoritm-predictive-maintenance-Swiss-full.pptx
@@ -3609,7 +3609,7 @@
             <a:avLst/>
           </a:prstGeom>
           <a:solidFill>
-            <a:srgbClr val="141212"/>
+            <a:srgbClr val="383D42"/>
           </a:solidFill>
           <a:ln>
             <a:noFill/>
@@ -3658,7 +3658,7 @@
                 <a:srgbClr val="93402B"/>
               </a:gs>
               <a:gs pos="100000">
-                <a:srgbClr val="141212"/>
+                <a:srgbClr val="383D42"/>
               </a:gs>
             </a:gsLst>
             <a:lin scaled="0" ang="13500000"/>
@@ -10263,7 +10263,7 @@
             <a:avLst/>
           </a:prstGeom>
           <a:solidFill>
-            <a:srgbClr val="141212"/>
+            <a:srgbClr val="383D42"/>
           </a:solidFill>
           <a:ln>
             <a:noFill/>
@@ -10312,7 +10312,7 @@
                 <a:srgbClr val="93402B"/>
               </a:gs>
               <a:gs pos="100000">
-                <a:srgbClr val="141212"/>
+                <a:srgbClr val="383D42"/>
               </a:gs>
             </a:gsLst>
             <a:lin scaled="0" ang="13500000"/>
@@ -14677,7 +14677,7 @@
             <a:avLst/>
           </a:prstGeom>
           <a:solidFill>
-            <a:srgbClr val="141212"/>
+            <a:srgbClr val="383D42"/>
           </a:solidFill>
           <a:ln>
             <a:noFill/>
@@ -14726,7 +14726,7 @@
                 <a:srgbClr val="93402B"/>
               </a:gs>
               <a:gs pos="100000">
-                <a:srgbClr val="141212"/>
+                <a:srgbClr val="383D42"/>
               </a:gs>
             </a:gsLst>
             <a:lin scaled="0" ang="13500000"/>
@@ -17177,7 +17177,7 @@
             <a:avLst/>
           </a:prstGeom>
           <a:solidFill>
-            <a:srgbClr val="141212"/>
+            <a:srgbClr val="383D42"/>
           </a:solidFill>
           <a:ln>
             <a:noFill/>
@@ -17226,7 +17226,7 @@
                 <a:srgbClr val="93402B"/>
               </a:gs>
               <a:gs pos="100000">
-                <a:srgbClr val="141212"/>
+                <a:srgbClr val="383D42"/>
               </a:gs>
             </a:gsLst>
             <a:lin scaled="0" ang="13500000"/>
@@ -17426,7 +17426,7 @@
             <a:avLst/>
           </a:prstGeom>
           <a:solidFill>
-            <a:srgbClr val="141212"/>
+            <a:srgbClr val="383D42"/>
           </a:solidFill>
           <a:ln>
             <a:noFill/>
@@ -20791,8 +20791,8 @@
         </p:blipFill>
         <p:spPr>
           <a:xfrm>
-            <a:off x="2258568" y="2443172"/>
-            <a:ext cx="7644384" cy="3014071"/>
+            <a:off x="2258568" y="3309991"/>
+            <a:ext cx="7644384" cy="1280434"/>
           </a:xfrm>
           <a:prstGeom prst="rect">
             <a:avLst/>
@@ -20807,7 +20807,7 @@
         </p:nvSpPr>
         <p:spPr>
           <a:xfrm>
-            <a:off x="2258568" y="5182923"/>
+            <a:off x="2258568" y="4316105"/>
             <a:ext cx="7644384" cy="274320"/>
           </a:xfrm>
           <a:prstGeom prst="rect">
@@ -21637,7 +21637,7 @@
             <a:avLst/>
           </a:prstGeom>
           <a:solidFill>
-            <a:srgbClr val="141212"/>
+            <a:srgbClr val="383D42"/>
           </a:solidFill>
           <a:ln>
             <a:noFill/>
@@ -25251,7 +25251,7 @@
             <a:avLst/>
           </a:prstGeom>
           <a:solidFill>
-            <a:srgbClr val="141212"/>
+            <a:srgbClr val="383D42"/>
           </a:solidFill>
           <a:ln>
             <a:noFill/>
